--- a/tests/ces.pptx
+++ b/tests/ces.pptx
@@ -6,6 +6,8 @@
   </p:sldMasterIdLst>
   <p:sldIdLst>
     <p:sldId id="256" r:id="rId3"/>
+    <p:sldId id="257" r:id="rId4"/>
+    <p:sldId id="258" r:id="rId5"/>
   </p:sldIdLst>
   <p:sldSz cx="12192000" cy="6858000"/>
   <p:notesSz cx="6858000" cy="9144000"/>
@@ -3121,6 +3123,10 @@
         <p:txBody>
           <a:bodyPr/>
           <a:p>
+            <a:r>
+              <a:rPr lang="zh-CN" altLang="en-US"/>
+              <a:t>发的官方的</a:t>
+            </a:r>
             <a:endParaRPr lang="zh-CN" altLang="en-US"/>
           </a:p>
         </p:txBody>
@@ -3136,6 +3142,144 @@
 </p:sld>
 </file>
 
+<file path=ppt/slides/slide2.xml><?xml version="1.0" encoding="utf-8"?>
+<p:sld xmlns:a="http://schemas.openxmlformats.org/drawingml/2006/main" xmlns:r="http://schemas.openxmlformats.org/officeDocument/2006/relationships" xmlns:p="http://schemas.openxmlformats.org/presentationml/2006/main">
+  <p:cSld>
+    <p:spTree>
+      <p:nvGrpSpPr>
+        <p:cNvPr id="1" name=""/>
+        <p:cNvGrpSpPr/>
+        <p:nvPr/>
+      </p:nvGrpSpPr>
+      <p:grpSpPr/>
+      <p:sp>
+        <p:nvSpPr>
+          <p:cNvPr id="2" name="标题 1"/>
+          <p:cNvSpPr>
+            <a:spLocks noGrp="1"/>
+          </p:cNvSpPr>
+          <p:nvPr>
+            <p:ph type="title"/>
+            <p:custDataLst>
+              <p:tags r:id="rId1"/>
+            </p:custDataLst>
+          </p:nvPr>
+        </p:nvSpPr>
+        <p:spPr/>
+        <p:txBody>
+          <a:bodyPr/>
+          <a:p>
+            <a:r>
+              <a:rPr lang="zh-CN" altLang="en-US"/>
+              <a:t>方法</a:t>
+            </a:r>
+            <a:endParaRPr lang="zh-CN" altLang="en-US"/>
+          </a:p>
+        </p:txBody>
+      </p:sp>
+      <p:sp>
+        <p:nvSpPr>
+          <p:cNvPr id="3" name="内容占位符 2"/>
+          <p:cNvSpPr>
+            <a:spLocks noGrp="1"/>
+          </p:cNvSpPr>
+          <p:nvPr>
+            <p:ph idx="1"/>
+            <p:custDataLst>
+              <p:tags r:id="rId2"/>
+            </p:custDataLst>
+          </p:nvPr>
+        </p:nvSpPr>
+        <p:spPr/>
+        <p:txBody>
+          <a:bodyPr/>
+          <a:p>
+            <a:r>
+              <a:rPr lang="zh-CN" altLang="en-US"/>
+              <a:t>第三方似懂非懂顺丰</a:t>
+            </a:r>
+            <a:endParaRPr lang="zh-CN" altLang="en-US"/>
+          </a:p>
+        </p:txBody>
+      </p:sp>
+    </p:spTree>
+    <p:custDataLst>
+      <p:tags r:id="rId3"/>
+    </p:custDataLst>
+  </p:cSld>
+  <p:clrMapOvr>
+    <a:masterClrMapping/>
+  </p:clrMapOvr>
+</p:sld>
+</file>
+
+<file path=ppt/slides/slide3.xml><?xml version="1.0" encoding="utf-8"?>
+<p:sld xmlns:a="http://schemas.openxmlformats.org/drawingml/2006/main" xmlns:r="http://schemas.openxmlformats.org/officeDocument/2006/relationships" xmlns:p="http://schemas.openxmlformats.org/presentationml/2006/main">
+  <p:cSld>
+    <p:spTree>
+      <p:nvGrpSpPr>
+        <p:cNvPr id="1" name=""/>
+        <p:cNvGrpSpPr/>
+        <p:nvPr/>
+      </p:nvGrpSpPr>
+      <p:grpSpPr/>
+      <p:sp>
+        <p:nvSpPr>
+          <p:cNvPr id="2" name="标题 1"/>
+          <p:cNvSpPr>
+            <a:spLocks noGrp="1"/>
+          </p:cNvSpPr>
+          <p:nvPr>
+            <p:ph type="title"/>
+            <p:custDataLst>
+              <p:tags r:id="rId1"/>
+            </p:custDataLst>
+          </p:nvPr>
+        </p:nvSpPr>
+        <p:spPr/>
+        <p:txBody>
+          <a:bodyPr/>
+          <a:p>
+            <a:endParaRPr lang="zh-CN" altLang="en-US"/>
+          </a:p>
+        </p:txBody>
+      </p:sp>
+      <p:sp>
+        <p:nvSpPr>
+          <p:cNvPr id="3" name="内容占位符 2"/>
+          <p:cNvSpPr>
+            <a:spLocks noGrp="1"/>
+          </p:cNvSpPr>
+          <p:nvPr>
+            <p:ph idx="1"/>
+            <p:custDataLst>
+              <p:tags r:id="rId2"/>
+            </p:custDataLst>
+          </p:nvPr>
+        </p:nvSpPr>
+        <p:spPr/>
+        <p:txBody>
+          <a:bodyPr/>
+          <a:p>
+            <a:r>
+              <a:rPr lang="zh-CN" altLang="en-US"/>
+              <a:t>弟弟</a:t>
+            </a:r>
+            <a:endParaRPr lang="zh-CN" altLang="en-US"/>
+          </a:p>
+        </p:txBody>
+      </p:sp>
+    </p:spTree>
+    <p:custDataLst>
+      <p:tags r:id="rId3"/>
+    </p:custDataLst>
+  </p:cSld>
+  <p:clrMapOvr>
+    <a:masterClrMapping/>
+  </p:clrMapOvr>
+</p:sld>
+</file>
+
 <file path=ppt/tags/tag1.xml><?xml version="1.0" encoding="utf-8"?>
 <p:tagLst xmlns:p="http://schemas.openxmlformats.org/presentationml/2006/main">
   <p:tag name="KSO_WM_UNIT_HIGHLIGHT" val="0"/>
@@ -3973,6 +4117,53 @@
 </p:tagLst>
 </file>
 
+<file path=ppt/tags/tag66.xml><?xml version="1.0" encoding="utf-8"?>
+<p:tagLst xmlns:p="http://schemas.openxmlformats.org/presentationml/2006/main">
+  <p:tag name="KSO_WM_UNIT_HIGHLIGHT" val="0"/>
+  <p:tag name="KSO_WM_UNIT_COMPATIBLE" val="0"/>
+  <p:tag name="KSO_WM_UNIT_DIAGRAM_ISNUMVISUAL" val="0"/>
+  <p:tag name="KSO_WM_UNIT_DIAGRAM_ISREFERUNIT" val="0"/>
+  <p:tag name="KSO_WM_UNIT_ID" val="_2**"/>
+  <p:tag name="KSO_WM_UNIT_LAYERLEVEL" val="1"/>
+  <p:tag name="KSO_WM_TAG_VERSION" val="1.0"/>
+  <p:tag name="KSO_WM_BEAUTIFY_FLAG" val="#wm#"/>
+</p:tagLst>
+</file>
+
+<file path=ppt/tags/tag67.xml><?xml version="1.0" encoding="utf-8"?>
+<p:tagLst xmlns:p="http://schemas.openxmlformats.org/presentationml/2006/main">
+  <p:tag name="KSO_WM_UNIT_HIGHLIGHT" val="0"/>
+  <p:tag name="KSO_WM_UNIT_COMPATIBLE" val="0"/>
+  <p:tag name="KSO_WM_UNIT_DIAGRAM_ISNUMVISUAL" val="0"/>
+  <p:tag name="KSO_WM_UNIT_DIAGRAM_ISREFERUNIT" val="0"/>
+  <p:tag name="KSO_WM_UNIT_ID" val="_2**"/>
+  <p:tag name="KSO_WM_UNIT_LAYERLEVEL" val="1"/>
+  <p:tag name="KSO_WM_TAG_VERSION" val="1.0"/>
+  <p:tag name="KSO_WM_BEAUTIFY_FLAG" val="#wm#"/>
+</p:tagLst>
+</file>
+
+<file path=ppt/tags/tag68.xml><?xml version="1.0" encoding="utf-8"?>
+<p:tagLst xmlns:p="http://schemas.openxmlformats.org/presentationml/2006/main">
+  <p:tag name="KSO_WM_BEAUTIFY_FLAG" val="#wm#"/>
+  <p:tag name="KSO_WM_TEMPLATE_CATEGORY" val="custom"/>
+  <p:tag name="KSO_WM_TEMPLATE_INDEX" val="20205081"/>
+</p:tagLst>
+</file>
+
+<file path=ppt/tags/tag69.xml><?xml version="1.0" encoding="utf-8"?>
+<p:tagLst xmlns:p="http://schemas.openxmlformats.org/presentationml/2006/main">
+  <p:tag name="KSO_WM_UNIT_HIGHLIGHT" val="0"/>
+  <p:tag name="KSO_WM_UNIT_COMPATIBLE" val="0"/>
+  <p:tag name="KSO_WM_UNIT_DIAGRAM_ISNUMVISUAL" val="0"/>
+  <p:tag name="KSO_WM_UNIT_DIAGRAM_ISREFERUNIT" val="0"/>
+  <p:tag name="KSO_WM_UNIT_ID" val="_2**"/>
+  <p:tag name="KSO_WM_UNIT_LAYERLEVEL" val="1"/>
+  <p:tag name="KSO_WM_TAG_VERSION" val="1.0"/>
+  <p:tag name="KSO_WM_BEAUTIFY_FLAG" val="#wm#"/>
+</p:tagLst>
+</file>
+
 <file path=ppt/tags/tag7.xml><?xml version="1.0" encoding="utf-8"?>
 <p:tagLst xmlns:p="http://schemas.openxmlformats.org/presentationml/2006/main">
   <p:tag name="KSO_WM_UNIT_HIGHLIGHT" val="0"/>
@@ -3983,6 +4174,27 @@
   <p:tag name="KSO_WM_UNIT_LAYERLEVEL" val="1"/>
   <p:tag name="KSO_WM_TAG_VERSION" val="1.0"/>
   <p:tag name="KSO_WM_BEAUTIFY_FLAG" val="#wm#"/>
+</p:tagLst>
+</file>
+
+<file path=ppt/tags/tag70.xml><?xml version="1.0" encoding="utf-8"?>
+<p:tagLst xmlns:p="http://schemas.openxmlformats.org/presentationml/2006/main">
+  <p:tag name="KSO_WM_UNIT_HIGHLIGHT" val="0"/>
+  <p:tag name="KSO_WM_UNIT_COMPATIBLE" val="0"/>
+  <p:tag name="KSO_WM_UNIT_DIAGRAM_ISNUMVISUAL" val="0"/>
+  <p:tag name="KSO_WM_UNIT_DIAGRAM_ISREFERUNIT" val="0"/>
+  <p:tag name="KSO_WM_UNIT_ID" val="_2**"/>
+  <p:tag name="KSO_WM_UNIT_LAYERLEVEL" val="1"/>
+  <p:tag name="KSO_WM_TAG_VERSION" val="1.0"/>
+  <p:tag name="KSO_WM_BEAUTIFY_FLAG" val="#wm#"/>
+</p:tagLst>
+</file>
+
+<file path=ppt/tags/tag71.xml><?xml version="1.0" encoding="utf-8"?>
+<p:tagLst xmlns:p="http://schemas.openxmlformats.org/presentationml/2006/main">
+  <p:tag name="KSO_WM_BEAUTIFY_FLAG" val="#wm#"/>
+  <p:tag name="KSO_WM_TEMPLATE_CATEGORY" val="custom"/>
+  <p:tag name="KSO_WM_TEMPLATE_INDEX" val="20205081"/>
 </p:tagLst>
 </file>
 
